--- a/1. Kubernetes.pptx
+++ b/1. Kubernetes.pptx
@@ -6,7 +6,7 @@
     <p:sldMasterId id="2147483660" r:id="rId2"/>
   </p:sldMasterIdLst>
   <p:notesMasterIdLst>
-    <p:notesMasterId r:id="rId38"/>
+    <p:notesMasterId r:id="rId39"/>
   </p:notesMasterIdLst>
   <p:sldIdLst>
     <p:sldId id="256" r:id="rId3"/>
@@ -44,6 +44,7 @@
     <p:sldId id="292" r:id="rId35"/>
     <p:sldId id="293" r:id="rId36"/>
     <p:sldId id="294" r:id="rId37"/>
+    <p:sldId id="295" r:id="rId38"/>
   </p:sldIdLst>
   <p:sldSz cx="9144000" cy="5143500" type="screen16x9"/>
   <p:notesSz cx="5143500" cy="9144000"/>
@@ -30997,6 +30998,95 @@
         </p:txBody>
       </p:sp>
     </p:spTree>
+  </p:cSld>
+  <p:clrMapOvr>
+    <a:masterClrMapping/>
+  </p:clrMapOvr>
+</p:sld>
+</file>
+
+<file path=ppt/slides/slide36.xml><?xml version="1.0" encoding="utf-8"?>
+<p:sld xmlns:a="http://schemas.openxmlformats.org/drawingml/2006/main" xmlns:r="http://schemas.openxmlformats.org/officeDocument/2006/relationships" xmlns:p="http://schemas.openxmlformats.org/presentationml/2006/main">
+  <p:cSld>
+    <p:spTree>
+      <p:nvGrpSpPr>
+        <p:cNvPr id="1" name=""/>
+        <p:cNvGrpSpPr/>
+        <p:nvPr/>
+      </p:nvGrpSpPr>
+      <p:grpSpPr>
+        <a:xfrm>
+          <a:off x="0" y="0"/>
+          <a:ext cx="0" cy="0"/>
+          <a:chOff x="0" y="0"/>
+          <a:chExt cx="0" cy="0"/>
+        </a:xfrm>
+      </p:grpSpPr>
+      <p:sp>
+        <p:nvSpPr>
+          <p:cNvPr id="2" name="Title 1">
+            <a:extLst>
+              <a:ext uri="{FF2B5EF4-FFF2-40B4-BE49-F238E27FC236}">
+                <a16:creationId xmlns:a16="http://schemas.microsoft.com/office/drawing/2014/main" id="{285DB49A-80F2-38EA-16FC-17B3FE7B38DB}"/>
+              </a:ext>
+            </a:extLst>
+          </p:cNvPr>
+          <p:cNvSpPr>
+            <a:spLocks noGrp="1"/>
+          </p:cNvSpPr>
+          <p:nvPr>
+            <p:ph type="ctrTitle"/>
+          </p:nvPr>
+        </p:nvSpPr>
+        <p:spPr/>
+        <p:txBody>
+          <a:bodyPr/>
+          <a:lstStyle/>
+          <a:p>
+            <a:r>
+              <a:rPr lang="en-US" dirty="0"/>
+              <a:t>Links to access Hands-on Guide</a:t>
+            </a:r>
+          </a:p>
+        </p:txBody>
+      </p:sp>
+      <p:sp>
+        <p:nvSpPr>
+          <p:cNvPr id="3" name="Subtitle 2">
+            <a:extLst>
+              <a:ext uri="{FF2B5EF4-FFF2-40B4-BE49-F238E27FC236}">
+                <a16:creationId xmlns:a16="http://schemas.microsoft.com/office/drawing/2014/main" id="{DBD7EB28-CB44-9BDD-9C9D-9DB6E84854C3}"/>
+              </a:ext>
+            </a:extLst>
+          </p:cNvPr>
+          <p:cNvSpPr>
+            <a:spLocks noGrp="1"/>
+          </p:cNvSpPr>
+          <p:nvPr>
+            <p:ph type="subTitle" idx="1"/>
+          </p:nvPr>
+        </p:nvSpPr>
+        <p:spPr/>
+        <p:txBody>
+          <a:bodyPr/>
+          <a:lstStyle/>
+          <a:p>
+            <a:r>
+              <a:rPr lang="en-US" sz="1200"/>
+              <a:t>https://atul-matkawala-232.github.io/K8s-material/K8s-Replicaset/k8s-rc-replicaset-handson.html</a:t>
+            </a:r>
+          </a:p>
+          <a:p>
+            <a:endParaRPr lang="en-US" sz="1200" dirty="0"/>
+          </a:p>
+        </p:txBody>
+      </p:sp>
+    </p:spTree>
+    <p:extLst>
+      <p:ext uri="{BB962C8B-B14F-4D97-AF65-F5344CB8AC3E}">
+        <p14:creationId xmlns:p14="http://schemas.microsoft.com/office/powerpoint/2010/main" val="117957978"/>
+      </p:ext>
+    </p:extLst>
   </p:cSld>
   <p:clrMapOvr>
     <a:masterClrMapping/>
